--- a/public/fun/cards/food/food-44.pptx
+++ b/public/fun/cards/food/food-44.pptx
@@ -3085,7 +3085,7 @@
     <p:bg>
       <p:bgPr>
         <a:solidFill>
-          <a:srgbClr val="FFFFFF"/>
+          <a:srgbClr val="FBE6EA"/>
         </a:solidFill>
         <a:effectLst/>
       </p:bgPr>
@@ -3099,38 +3099,20 @@
       <p:grpSpPr/>
       <p:sp>
         <p:nvSpPr>
-          <p:cNvPr id="2" name="Freeform 1"/>
+          <p:cNvPr id="2" name="Rectangle 1"/>
           <p:cNvSpPr/>
           <p:nvPr/>
         </p:nvSpPr>
         <p:spPr>
           <a:xfrm>
-            <a:off x="1944000" y="540000"/>
-            <a:ext cx="1296000" cy="1260000"/>
+            <a:off x="252000" y="144000"/>
+            <a:ext cx="201600" cy="21600"/>
           </a:xfrm>
-          <a:custGeom>
+          <a:prstGeom prst="rect">
             <a:avLst/>
-            <a:gdLst/>
-            <a:ahLst/>
-            <a:cxnLst/>
-            <a:rect l="l" t="t" r="r" b="b"/>
-            <a:pathLst>
-              <a:path w="1296000" h="1260000">
-                <a:moveTo>
-                  <a:pt x="1296000" y="1260000"/>
-                </a:moveTo>
-                <a:lnTo>
-                  <a:pt x="1296000" y="0"/>
-                </a:lnTo>
-                <a:lnTo>
-                  <a:pt x="0" y="1260000"/>
-                </a:lnTo>
-                <a:close/>
-              </a:path>
-            </a:pathLst>
-          </a:custGeom>
+          </a:prstGeom>
           <a:solidFill>
-            <a:srgbClr val="29295B"/>
+            <a:srgbClr val="D90429"/>
           </a:solidFill>
           <a:ln>
             <a:noFill/>
@@ -3146,215 +3128,14 @@
       </p:sp>
       <p:sp>
         <p:nvSpPr>
-          <p:cNvPr id="3" name="Freeform 2"/>
-          <p:cNvSpPr/>
+          <p:cNvPr id="3" name="텍스트"/>
+          <p:cNvSpPr txBox="1"/>
           <p:nvPr/>
         </p:nvSpPr>
         <p:spPr>
           <a:xfrm>
-            <a:off x="2520000" y="1080000"/>
-            <a:ext cx="720000" cy="720000"/>
-          </a:xfrm>
-          <a:custGeom>
-            <a:avLst/>
-            <a:gdLst/>
-            <a:ahLst/>
-            <a:cxnLst/>
-            <a:rect l="l" t="t" r="r" b="b"/>
-            <a:pathLst>
-              <a:path w="720000" h="720000">
-                <a:moveTo>
-                  <a:pt x="720000" y="720000"/>
-                </a:moveTo>
-                <a:lnTo>
-                  <a:pt x="720000" y="0"/>
-                </a:lnTo>
-                <a:lnTo>
-                  <a:pt x="0" y="720000"/>
-                </a:lnTo>
-                <a:close/>
-              </a:path>
-            </a:pathLst>
-          </a:custGeom>
-          <a:solidFill>
-            <a:srgbClr val="D3D3EE">
-              <a:alpha val="90000"/>
-            </a:srgbClr>
-          </a:solidFill>
-          <a:ln>
-            <a:noFill/>
-          </a:ln>
-        </p:spPr>
-        <p:txBody>
-          <a:bodyPr rtlCol="0" anchor="ctr"/>
-          <a:lstStyle/>
-          <a:p>
-            <a:pPr algn="ctr"/>
-          </a:p>
-        </p:txBody>
-      </p:sp>
-      <p:sp>
-        <p:nvSpPr>
-          <p:cNvPr id="4" name="Freeform 3"/>
-          <p:cNvSpPr/>
-          <p:nvPr/>
-        </p:nvSpPr>
-        <p:spPr>
-          <a:xfrm>
-            <a:off x="2872080" y="1449360"/>
-            <a:ext cx="159840" cy="117216"/>
-          </a:xfrm>
-          <a:custGeom>
-            <a:avLst/>
-            <a:gdLst/>
-            <a:ahLst/>
-            <a:cxnLst/>
-            <a:rect l="l" t="t" r="r" b="b"/>
-            <a:pathLst>
-              <a:path w="159840" h="117216">
-                <a:moveTo>
-                  <a:pt x="0" y="0"/>
-                </a:moveTo>
-                <a:lnTo>
-                  <a:pt x="159840" y="0"/>
-                </a:lnTo>
-                <a:lnTo>
-                  <a:pt x="143856" y="117216"/>
-                </a:lnTo>
-                <a:lnTo>
-                  <a:pt x="15984" y="117216"/>
-                </a:lnTo>
-                <a:close/>
-              </a:path>
-            </a:pathLst>
-          </a:custGeom>
-          <a:solidFill>
-            <a:srgbClr val="FFFFFF"/>
-          </a:solidFill>
-          <a:ln>
-            <a:noFill/>
-          </a:ln>
-        </p:spPr>
-        <p:txBody>
-          <a:bodyPr rtlCol="0" anchor="ctr"/>
-          <a:lstStyle/>
-          <a:p>
-            <a:pPr algn="ctr"/>
-          </a:p>
-        </p:txBody>
-      </p:sp>
-      <p:sp>
-        <p:nvSpPr>
-          <p:cNvPr id="5" name="Oval 4"/>
-          <p:cNvSpPr/>
-          <p:nvPr/>
-        </p:nvSpPr>
-        <p:spPr>
-          <a:xfrm>
-            <a:off x="3010608" y="1460016"/>
-            <a:ext cx="74592" cy="74592"/>
-          </a:xfrm>
-          <a:prstGeom prst="ellipse">
-            <a:avLst/>
-          </a:prstGeom>
-          <a:noFill/>
-          <a:ln w="15984">
-            <a:solidFill>
-              <a:srgbClr val="FFFFFF"/>
-            </a:solidFill>
-          </a:ln>
-        </p:spPr>
-        <p:txBody>
-          <a:bodyPr rtlCol="0" anchor="ctr"/>
-          <a:lstStyle/>
-          <a:p>
-            <a:pPr algn="ctr"/>
-          </a:p>
-        </p:txBody>
-      </p:sp>
-      <p:sp>
-        <p:nvSpPr>
-          <p:cNvPr id="6" name="Rounded Rectangle 5"/>
-          <p:cNvSpPr/>
-          <p:nvPr/>
-        </p:nvSpPr>
-        <p:spPr>
-          <a:xfrm>
-            <a:off x="2840112" y="1571904"/>
-            <a:ext cx="223776" cy="18648"/>
-          </a:xfrm>
-          <a:prstGeom prst="roundRect">
-            <a:avLst>
-              <a:gd name="adj" fmla="val 42857"/>
-            </a:avLst>
-          </a:prstGeom>
-          <a:solidFill>
-            <a:srgbClr val="737373"/>
-          </a:solidFill>
-          <a:ln>
-            <a:noFill/>
-          </a:ln>
-        </p:spPr>
-        <p:txBody>
-          <a:bodyPr rtlCol="0" anchor="ctr"/>
-          <a:lstStyle/>
-          <a:p>
-            <a:pPr algn="ctr"/>
-          </a:p>
-        </p:txBody>
-      </p:sp>
-      <p:cxnSp>
-        <p:nvCxnSpPr>
-          <p:cNvPr id="7" name="Connector 6"/>
-          <p:cNvCxnSpPr/>
-          <p:nvPr/>
-        </p:nvCxnSpPr>
-        <p:spPr>
-          <a:xfrm flipV="1">
-            <a:off x="2925360" y="1380096"/>
-            <a:ext cx="10656" cy="42624"/>
-          </a:xfrm>
-          <a:prstGeom prst="line">
-            <a:avLst/>
-          </a:prstGeom>
-          <a:ln w="13320">
-            <a:solidFill>
-              <a:srgbClr val="737373"/>
-            </a:solidFill>
-          </a:ln>
-        </p:spPr>
-      </p:cxnSp>
-      <p:cxnSp>
-        <p:nvCxnSpPr>
-          <p:cNvPr id="8" name="Connector 7"/>
-          <p:cNvCxnSpPr/>
-          <p:nvPr/>
-        </p:nvCxnSpPr>
-        <p:spPr>
-          <a:xfrm flipV="1">
-            <a:off x="2973312" y="1380096"/>
-            <a:ext cx="10656" cy="42624"/>
-          </a:xfrm>
-          <a:prstGeom prst="line">
-            <a:avLst/>
-          </a:prstGeom>
-          <a:ln w="13320">
-            <a:solidFill>
-              <a:srgbClr val="737373"/>
-            </a:solidFill>
-          </a:ln>
-        </p:spPr>
-      </p:cxnSp>
-      <p:sp>
-        <p:nvSpPr>
-          <p:cNvPr id="9" name="텍스트"/>
-          <p:cNvSpPr txBox="1"/>
-          <p:nvPr/>
-        </p:nvSpPr>
-        <p:spPr>
-          <a:xfrm>
-            <a:off x="252000" y="201600"/>
-            <a:ext cx="1800000" cy="100800"/>
+            <a:off x="252000" y="273600"/>
+            <a:ext cx="2160000" cy="360000"/>
           </a:xfrm>
           <a:prstGeom prst="rect">
             <a:avLst/>
@@ -3369,32 +3150,32 @@
           <a:p>
             <a:pPr algn="l">
               <a:lnSpc>
-                <a:spcPts val="1087"/>
+                <a:spcPts val="3190"/>
               </a:lnSpc>
             </a:pPr>
             <a:r>
-              <a:rPr sz="750" b="1" spc="150">
+              <a:rPr sz="2200" b="1">
                 <a:solidFill>
-                  <a:srgbClr val="6A6A7E"/>
+                  <a:srgbClr val="12151C"/>
                 </a:solidFill>
                 <a:latin typeface="맑은 고딕"/>
                 <a:ea typeface="맑은 고딕"/>
               </a:rPr>
-              <a:t>상호명</a:t>
-            </a:r>
-          </a:p>
-        </p:txBody>
-      </p:sp>
-      <p:sp>
-        <p:nvSpPr>
-          <p:cNvPr id="10" name="텍스트"/>
+              <a:t>연주혁</a:t>
+            </a:r>
+          </a:p>
+        </p:txBody>
+      </p:sp>
+      <p:sp>
+        <p:nvSpPr>
+          <p:cNvPr id="4" name="텍스트"/>
           <p:cNvSpPr txBox="1"/>
           <p:nvPr/>
         </p:nvSpPr>
         <p:spPr>
           <a:xfrm>
-            <a:off x="252000" y="360000"/>
-            <a:ext cx="2016000" cy="313692"/>
+            <a:off x="252000" y="676800"/>
+            <a:ext cx="2160000" cy="171451"/>
           </a:xfrm>
           <a:prstGeom prst="rect">
             <a:avLst/>
@@ -3409,32 +3190,32 @@
           <a:p>
             <a:pPr algn="l">
               <a:lnSpc>
-                <a:spcPts val="2755"/>
+                <a:spcPts val="1305"/>
               </a:lnSpc>
             </a:pPr>
             <a:r>
-              <a:rPr sz="1900" b="1" spc="50">
+              <a:rPr sz="900" b="0">
                 <a:solidFill>
-                  <a:srgbClr val="191938"/>
+                  <a:srgbClr val="5E0F21"/>
                 </a:solidFill>
                 <a:latin typeface="맑은 고딕"/>
                 <a:ea typeface="맑은 고딕"/>
               </a:rPr>
-              <a:t>연주혁</a:t>
-            </a:r>
-          </a:p>
-        </p:txBody>
-      </p:sp>
-      <p:sp>
-        <p:nvSpPr>
-          <p:cNvPr id="11" name="텍스트"/>
+              <a:t>사장</a:t>
+            </a:r>
+          </a:p>
+        </p:txBody>
+      </p:sp>
+      <p:sp>
+        <p:nvSpPr>
+          <p:cNvPr id="5" name="텍스트"/>
           <p:cNvSpPr txBox="1"/>
           <p:nvPr/>
         </p:nvSpPr>
         <p:spPr>
           <a:xfrm>
-            <a:off x="252000" y="655200"/>
-            <a:ext cx="1872000" cy="122400"/>
+            <a:off x="1548000" y="230400"/>
+            <a:ext cx="1440000" cy="123826"/>
           </a:xfrm>
           <a:prstGeom prst="rect">
             <a:avLst/>
@@ -3447,63 +3228,55 @@
           </a:bodyPr>
           <a:lstStyle/>
           <a:p>
-            <a:pPr algn="l">
+            <a:pPr algn="r">
               <a:lnSpc>
-                <a:spcPts val="1232"/>
+                <a:spcPts val="942"/>
               </a:lnSpc>
             </a:pPr>
             <a:r>
-              <a:rPr sz="850" b="1">
+              <a:rPr sz="650" b="1" spc="200">
                 <a:solidFill>
-                  <a:srgbClr val="29295B"/>
+                  <a:srgbClr val="5E0F21"/>
                 </a:solidFill>
                 <a:latin typeface="맑은 고딕"/>
                 <a:ea typeface="맑은 고딕"/>
               </a:rPr>
-              <a:t>사장</a:t>
-            </a:r>
-          </a:p>
-        </p:txBody>
-      </p:sp>
-      <p:sp>
-        <p:nvSpPr>
-          <p:cNvPr id="12" name="Rectangle 11"/>
-          <p:cNvSpPr/>
+              <a:t>상호명</a:t>
+            </a:r>
+          </a:p>
+        </p:txBody>
+      </p:sp>
+      <p:cxnSp>
+        <p:nvCxnSpPr>
+          <p:cNvPr id="6" name="Connector 5"/>
+          <p:cNvCxnSpPr/>
           <p:nvPr/>
-        </p:nvSpPr>
+        </p:nvCxnSpPr>
         <p:spPr>
           <a:xfrm>
-            <a:off x="252000" y="864000"/>
-            <a:ext cx="230400" cy="14400"/>
+            <a:off x="252000" y="1051200"/>
+            <a:ext cx="2736000" cy="0"/>
           </a:xfrm>
-          <a:prstGeom prst="rect">
+          <a:prstGeom prst="line">
             <a:avLst/>
           </a:prstGeom>
-          <a:solidFill>
-            <a:srgbClr val="29295B"/>
-          </a:solidFill>
-          <a:ln>
-            <a:noFill/>
+          <a:ln w="5760">
+            <a:solidFill>
+              <a:srgbClr val="F4B9C3"/>
+            </a:solidFill>
           </a:ln>
         </p:spPr>
-        <p:txBody>
-          <a:bodyPr rtlCol="0" anchor="ctr"/>
-          <a:lstStyle/>
-          <a:p>
-            <a:pPr algn="ctr"/>
-          </a:p>
-        </p:txBody>
-      </p:sp>
-      <p:sp>
-        <p:nvSpPr>
-          <p:cNvPr id="13" name="텍스트"/>
+      </p:cxnSp>
+      <p:sp>
+        <p:nvSpPr>
+          <p:cNvPr id="7" name="텍스트"/>
           <p:cNvSpPr txBox="1"/>
           <p:nvPr/>
         </p:nvSpPr>
         <p:spPr>
           <a:xfrm>
-            <a:off x="252000" y="1044000"/>
-            <a:ext cx="122400" cy="168911"/>
+            <a:off x="252000" y="1123200"/>
+            <a:ext cx="576000" cy="99061"/>
           </a:xfrm>
           <a:prstGeom prst="rect">
             <a:avLst/>
@@ -3518,32 +3291,32 @@
           <a:p>
             <a:pPr algn="l">
               <a:lnSpc>
-                <a:spcPts val="1015"/>
+                <a:spcPts val="754"/>
               </a:lnSpc>
             </a:pPr>
             <a:r>
-              <a:rPr sz="700" b="1">
+              <a:rPr sz="520" b="1" spc="150">
                 <a:solidFill>
-                  <a:srgbClr val="29295B"/>
+                  <a:srgbClr val="5E0F21"/>
                 </a:solidFill>
                 <a:latin typeface="맑은 고딕"/>
                 <a:ea typeface="맑은 고딕"/>
               </a:rPr>
-              <a:t>T</a:t>
-            </a:r>
-          </a:p>
-        </p:txBody>
-      </p:sp>
-      <p:sp>
-        <p:nvSpPr>
-          <p:cNvPr id="14" name="텍스트"/>
+              <a:t>TEL</a:t>
+            </a:r>
+          </a:p>
+        </p:txBody>
+      </p:sp>
+      <p:sp>
+        <p:nvSpPr>
+          <p:cNvPr id="8" name="텍스트"/>
           <p:cNvSpPr txBox="1"/>
           <p:nvPr/>
         </p:nvSpPr>
         <p:spPr>
           <a:xfrm>
-            <a:off x="396000" y="1044000"/>
-            <a:ext cx="1584000" cy="168911"/>
+            <a:off x="900000" y="1101600"/>
+            <a:ext cx="2088000" cy="142876"/>
           </a:xfrm>
           <a:prstGeom prst="rect">
             <a:avLst/>
@@ -3558,13 +3331,13 @@
           <a:p>
             <a:pPr algn="l">
               <a:lnSpc>
-                <a:spcPts val="1015"/>
+                <a:spcPts val="1087"/>
               </a:lnSpc>
             </a:pPr>
             <a:r>
-              <a:rPr sz="700" b="0">
+              <a:rPr sz="750" b="0">
                 <a:solidFill>
-                  <a:srgbClr val="191938"/>
+                  <a:srgbClr val="12151C"/>
                 </a:solidFill>
                 <a:latin typeface="맑은 고딕"/>
                 <a:ea typeface="맑은 고딕"/>
@@ -3574,16 +3347,37 @@
           </a:p>
         </p:txBody>
       </p:sp>
-      <p:sp>
-        <p:nvSpPr>
-          <p:cNvPr id="15" name="텍스트"/>
+      <p:cxnSp>
+        <p:nvCxnSpPr>
+          <p:cNvPr id="9" name="Connector 8"/>
+          <p:cNvCxnSpPr/>
+          <p:nvPr/>
+        </p:nvCxnSpPr>
+        <p:spPr>
+          <a:xfrm>
+            <a:off x="252000" y="1274400"/>
+            <a:ext cx="2736000" cy="0"/>
+          </a:xfrm>
+          <a:prstGeom prst="line">
+            <a:avLst/>
+          </a:prstGeom>
+          <a:ln w="5760">
+            <a:solidFill>
+              <a:srgbClr val="F4B9C3"/>
+            </a:solidFill>
+          </a:ln>
+        </p:spPr>
+      </p:cxnSp>
+      <p:sp>
+        <p:nvSpPr>
+          <p:cNvPr id="10" name="텍스트"/>
           <p:cNvSpPr txBox="1"/>
           <p:nvPr/>
         </p:nvSpPr>
         <p:spPr>
           <a:xfrm>
-            <a:off x="252000" y="1212911"/>
-            <a:ext cx="122400" cy="168911"/>
+            <a:off x="252000" y="1346400"/>
+            <a:ext cx="576000" cy="99061"/>
           </a:xfrm>
           <a:prstGeom prst="rect">
             <a:avLst/>
@@ -3598,32 +3392,32 @@
           <a:p>
             <a:pPr algn="l">
               <a:lnSpc>
-                <a:spcPts val="1015"/>
+                <a:spcPts val="754"/>
               </a:lnSpc>
             </a:pPr>
             <a:r>
-              <a:rPr sz="700" b="1">
+              <a:rPr sz="520" b="1" spc="150">
                 <a:solidFill>
-                  <a:srgbClr val="29295B"/>
+                  <a:srgbClr val="5E0F21"/>
                 </a:solidFill>
                 <a:latin typeface="맑은 고딕"/>
                 <a:ea typeface="맑은 고딕"/>
               </a:rPr>
-              <a:t>E</a:t>
-            </a:r>
-          </a:p>
-        </p:txBody>
-      </p:sp>
-      <p:sp>
-        <p:nvSpPr>
-          <p:cNvPr id="16" name="텍스트"/>
+              <a:t>MAIL</a:t>
+            </a:r>
+          </a:p>
+        </p:txBody>
+      </p:sp>
+      <p:sp>
+        <p:nvSpPr>
+          <p:cNvPr id="11" name="텍스트"/>
           <p:cNvSpPr txBox="1"/>
           <p:nvPr/>
         </p:nvSpPr>
         <p:spPr>
           <a:xfrm>
-            <a:off x="396000" y="1212911"/>
-            <a:ext cx="1584000" cy="168911"/>
+            <a:off x="900000" y="1324800"/>
+            <a:ext cx="2088000" cy="142876"/>
           </a:xfrm>
           <a:prstGeom prst="rect">
             <a:avLst/>
@@ -3638,13 +3432,13 @@
           <a:p>
             <a:pPr algn="l">
               <a:lnSpc>
-                <a:spcPts val="1015"/>
+                <a:spcPts val="1087"/>
               </a:lnSpc>
             </a:pPr>
             <a:r>
-              <a:rPr sz="700" b="0">
+              <a:rPr sz="750" b="0">
                 <a:solidFill>
-                  <a:srgbClr val="191938"/>
+                  <a:srgbClr val="12151C"/>
                 </a:solidFill>
                 <a:latin typeface="맑은 고딕"/>
                 <a:ea typeface="맑은 고딕"/>
@@ -3654,16 +3448,37 @@
           </a:p>
         </p:txBody>
       </p:sp>
-      <p:sp>
-        <p:nvSpPr>
-          <p:cNvPr id="17" name="텍스트"/>
+      <p:cxnSp>
+        <p:nvCxnSpPr>
+          <p:cNvPr id="12" name="Connector 11"/>
+          <p:cNvCxnSpPr/>
+          <p:nvPr/>
+        </p:nvCxnSpPr>
+        <p:spPr>
+          <a:xfrm>
+            <a:off x="252000" y="1497600"/>
+            <a:ext cx="2736000" cy="0"/>
+          </a:xfrm>
+          <a:prstGeom prst="line">
+            <a:avLst/>
+          </a:prstGeom>
+          <a:ln w="5760">
+            <a:solidFill>
+              <a:srgbClr val="F4B9C3"/>
+            </a:solidFill>
+          </a:ln>
+        </p:spPr>
+      </p:cxnSp>
+      <p:sp>
+        <p:nvSpPr>
+          <p:cNvPr id="13" name="텍스트"/>
           <p:cNvSpPr txBox="1"/>
           <p:nvPr/>
         </p:nvSpPr>
         <p:spPr>
           <a:xfrm>
-            <a:off x="252000" y="1381822"/>
-            <a:ext cx="122400" cy="168911"/>
+            <a:off x="252000" y="1569600"/>
+            <a:ext cx="576000" cy="99061"/>
           </a:xfrm>
           <a:prstGeom prst="rect">
             <a:avLst/>
@@ -3678,32 +3493,32 @@
           <a:p>
             <a:pPr algn="l">
               <a:lnSpc>
-                <a:spcPts val="1015"/>
+                <a:spcPts val="754"/>
               </a:lnSpc>
             </a:pPr>
             <a:r>
-              <a:rPr sz="700" b="1">
+              <a:rPr sz="520" b="1" spc="150">
                 <a:solidFill>
-                  <a:srgbClr val="29295B"/>
+                  <a:srgbClr val="5E0F21"/>
                 </a:solidFill>
                 <a:latin typeface="맑은 고딕"/>
                 <a:ea typeface="맑은 고딕"/>
               </a:rPr>
-              <a:t>A</a:t>
-            </a:r>
-          </a:p>
-        </p:txBody>
-      </p:sp>
-      <p:sp>
-        <p:nvSpPr>
-          <p:cNvPr id="18" name="텍스트"/>
+              <a:t>ADDR</a:t>
+            </a:r>
+          </a:p>
+        </p:txBody>
+      </p:sp>
+      <p:sp>
+        <p:nvSpPr>
+          <p:cNvPr id="14" name="텍스트"/>
           <p:cNvSpPr txBox="1"/>
           <p:nvPr/>
         </p:nvSpPr>
         <p:spPr>
           <a:xfrm>
-            <a:off x="396000" y="1381822"/>
-            <a:ext cx="1584000" cy="168911"/>
+            <a:off x="900000" y="1548000"/>
+            <a:ext cx="2088000" cy="142876"/>
           </a:xfrm>
           <a:prstGeom prst="rect">
             <a:avLst/>
@@ -3718,13 +3533,13 @@
           <a:p>
             <a:pPr algn="l">
               <a:lnSpc>
-                <a:spcPts val="1015"/>
+                <a:spcPts val="1087"/>
               </a:lnSpc>
             </a:pPr>
             <a:r>
-              <a:rPr sz="700" b="0">
+              <a:rPr sz="750" b="0">
                 <a:solidFill>
-                  <a:srgbClr val="191938"/>
+                  <a:srgbClr val="12151C"/>
                 </a:solidFill>
                 <a:latin typeface="맑은 고딕"/>
                 <a:ea typeface="맑은 고딕"/>
@@ -3734,6 +3549,27 @@
           </a:p>
         </p:txBody>
       </p:sp>
+      <p:cxnSp>
+        <p:nvCxnSpPr>
+          <p:cNvPr id="15" name="Connector 14"/>
+          <p:cNvCxnSpPr/>
+          <p:nvPr/>
+        </p:nvCxnSpPr>
+        <p:spPr>
+          <a:xfrm>
+            <a:off x="252000" y="1720800"/>
+            <a:ext cx="2736000" cy="0"/>
+          </a:xfrm>
+          <a:prstGeom prst="line">
+            <a:avLst/>
+          </a:prstGeom>
+          <a:ln w="5760">
+            <a:solidFill>
+              <a:srgbClr val="F4B9C3"/>
+            </a:solidFill>
+          </a:ln>
+        </p:spPr>
+      </p:cxnSp>
     </p:spTree>
   </p:cSld>
   <p:clrMapOvr>
@@ -3748,7 +3584,7 @@
     <p:bg>
       <p:bgPr>
         <a:solidFill>
-          <a:srgbClr val="191938"/>
+          <a:srgbClr val="FFFFFF"/>
         </a:solidFill>
         <a:effectLst/>
       </p:bgPr>
@@ -3762,338 +3598,14 @@
       <p:grpSpPr/>
       <p:sp>
         <p:nvSpPr>
-          <p:cNvPr id="2" name="Freeform 1"/>
-          <p:cNvSpPr/>
+          <p:cNvPr id="2" name="텍스트"/>
+          <p:cNvSpPr txBox="1"/>
           <p:nvPr/>
         </p:nvSpPr>
         <p:spPr>
           <a:xfrm>
-            <a:off x="2016000" y="576000"/>
-            <a:ext cx="1224000" cy="1224000"/>
-          </a:xfrm>
-          <a:custGeom>
-            <a:avLst/>
-            <a:gdLst/>
-            <a:ahLst/>
-            <a:cxnLst/>
-            <a:rect l="l" t="t" r="r" b="b"/>
-            <a:pathLst>
-              <a:path w="1224000" h="1224000">
-                <a:moveTo>
-                  <a:pt x="1224000" y="1224000"/>
-                </a:moveTo>
-                <a:lnTo>
-                  <a:pt x="0" y="1224000"/>
-                </a:lnTo>
-                <a:lnTo>
-                  <a:pt x="7696" y="1086955"/>
-                </a:lnTo>
-                <a:lnTo>
-                  <a:pt x="30688" y="951634"/>
-                </a:lnTo>
-                <a:lnTo>
-                  <a:pt x="68687" y="819738"/>
-                </a:lnTo>
-                <a:lnTo>
-                  <a:pt x="121214" y="692926"/>
-                </a:lnTo>
-                <a:lnTo>
-                  <a:pt x="187610" y="572793"/>
-                </a:lnTo>
-                <a:lnTo>
-                  <a:pt x="267038" y="460848"/>
-                </a:lnTo>
-                <a:lnTo>
-                  <a:pt x="358501" y="358501"/>
-                </a:lnTo>
-                <a:lnTo>
-                  <a:pt x="460848" y="267038"/>
-                </a:lnTo>
-                <a:lnTo>
-                  <a:pt x="572793" y="187610"/>
-                </a:lnTo>
-                <a:lnTo>
-                  <a:pt x="692926" y="121214"/>
-                </a:lnTo>
-                <a:lnTo>
-                  <a:pt x="819738" y="68687"/>
-                </a:lnTo>
-                <a:lnTo>
-                  <a:pt x="951634" y="30688"/>
-                </a:lnTo>
-                <a:lnTo>
-                  <a:pt x="1086955" y="7696"/>
-                </a:lnTo>
-                <a:lnTo>
-                  <a:pt x="1224000" y="0"/>
-                </a:lnTo>
-                <a:close/>
-              </a:path>
-            </a:pathLst>
-          </a:custGeom>
-          <a:solidFill>
-            <a:srgbClr val="656589"/>
-          </a:solidFill>
-          <a:ln>
-            <a:noFill/>
-          </a:ln>
-        </p:spPr>
-        <p:txBody>
-          <a:bodyPr rtlCol="0" anchor="ctr"/>
-          <a:lstStyle/>
-          <a:p>
-            <a:pPr algn="ctr"/>
-          </a:p>
-        </p:txBody>
-      </p:sp>
-      <p:sp>
-        <p:nvSpPr>
-          <p:cNvPr id="3" name="Freeform 2"/>
-          <p:cNvSpPr/>
-          <p:nvPr/>
-        </p:nvSpPr>
-        <p:spPr>
-          <a:xfrm>
-            <a:off x="2520000" y="1080000"/>
-            <a:ext cx="720000" cy="720000"/>
-          </a:xfrm>
-          <a:custGeom>
-            <a:avLst/>
-            <a:gdLst/>
-            <a:ahLst/>
-            <a:cxnLst/>
-            <a:rect l="l" t="t" r="r" b="b"/>
-            <a:pathLst>
-              <a:path w="720000" h="720000">
-                <a:moveTo>
-                  <a:pt x="720000" y="720000"/>
-                </a:moveTo>
-                <a:lnTo>
-                  <a:pt x="0" y="720000"/>
-                </a:lnTo>
-                <a:lnTo>
-                  <a:pt x="4527" y="639386"/>
-                </a:lnTo>
-                <a:lnTo>
-                  <a:pt x="18052" y="559785"/>
-                </a:lnTo>
-                <a:lnTo>
-                  <a:pt x="40404" y="482199"/>
-                </a:lnTo>
-                <a:lnTo>
-                  <a:pt x="71302" y="407604"/>
-                </a:lnTo>
-                <a:lnTo>
-                  <a:pt x="110359" y="336937"/>
-                </a:lnTo>
-                <a:lnTo>
-                  <a:pt x="157081" y="271087"/>
-                </a:lnTo>
-                <a:lnTo>
-                  <a:pt x="210883" y="210883"/>
-                </a:lnTo>
-                <a:lnTo>
-                  <a:pt x="271087" y="157081"/>
-                </a:lnTo>
-                <a:lnTo>
-                  <a:pt x="336937" y="110359"/>
-                </a:lnTo>
-                <a:lnTo>
-                  <a:pt x="407604" y="71302"/>
-                </a:lnTo>
-                <a:lnTo>
-                  <a:pt x="482199" y="40404"/>
-                </a:lnTo>
-                <a:lnTo>
-                  <a:pt x="559785" y="18052"/>
-                </a:lnTo>
-                <a:lnTo>
-                  <a:pt x="639386" y="4527"/>
-                </a:lnTo>
-                <a:lnTo>
-                  <a:pt x="720000" y="0"/>
-                </a:lnTo>
-                <a:close/>
-              </a:path>
-            </a:pathLst>
-          </a:custGeom>
-          <a:solidFill>
-            <a:srgbClr val="3E3E58"/>
-          </a:solidFill>
-          <a:ln>
-            <a:noFill/>
-          </a:ln>
-        </p:spPr>
-        <p:txBody>
-          <a:bodyPr rtlCol="0" anchor="ctr"/>
-          <a:lstStyle/>
-          <a:p>
-            <a:pPr algn="ctr"/>
-          </a:p>
-        </p:txBody>
-      </p:sp>
-      <p:sp>
-        <p:nvSpPr>
-          <p:cNvPr id="4" name="Freeform 3"/>
-          <p:cNvSpPr/>
-          <p:nvPr/>
-        </p:nvSpPr>
-        <p:spPr>
-          <a:xfrm>
-            <a:off x="2804400" y="1450800"/>
-            <a:ext cx="151200" cy="110880"/>
-          </a:xfrm>
-          <a:custGeom>
-            <a:avLst/>
-            <a:gdLst/>
-            <a:ahLst/>
-            <a:cxnLst/>
-            <a:rect l="l" t="t" r="r" b="b"/>
-            <a:pathLst>
-              <a:path w="151200" h="110880">
-                <a:moveTo>
-                  <a:pt x="0" y="0"/>
-                </a:moveTo>
-                <a:lnTo>
-                  <a:pt x="151200" y="0"/>
-                </a:lnTo>
-                <a:lnTo>
-                  <a:pt x="136080" y="110880"/>
-                </a:lnTo>
-                <a:lnTo>
-                  <a:pt x="15120" y="110880"/>
-                </a:lnTo>
-                <a:close/>
-              </a:path>
-            </a:pathLst>
-          </a:custGeom>
-          <a:solidFill>
-            <a:srgbClr val="FFFFFF"/>
-          </a:solidFill>
-          <a:ln>
-            <a:noFill/>
-          </a:ln>
-        </p:spPr>
-        <p:txBody>
-          <a:bodyPr rtlCol="0" anchor="ctr"/>
-          <a:lstStyle/>
-          <a:p>
-            <a:pPr algn="ctr"/>
-          </a:p>
-        </p:txBody>
-      </p:sp>
-      <p:sp>
-        <p:nvSpPr>
-          <p:cNvPr id="5" name="Oval 4"/>
-          <p:cNvSpPr/>
-          <p:nvPr/>
-        </p:nvSpPr>
-        <p:spPr>
-          <a:xfrm>
-            <a:off x="2935440" y="1460880"/>
-            <a:ext cx="70560" cy="70560"/>
-          </a:xfrm>
-          <a:prstGeom prst="ellipse">
-            <a:avLst/>
-          </a:prstGeom>
-          <a:noFill/>
-          <a:ln w="15120">
-            <a:solidFill>
-              <a:srgbClr val="FFFFFF"/>
-            </a:solidFill>
-          </a:ln>
-        </p:spPr>
-        <p:txBody>
-          <a:bodyPr rtlCol="0" anchor="ctr"/>
-          <a:lstStyle/>
-          <a:p>
-            <a:pPr algn="ctr"/>
-          </a:p>
-        </p:txBody>
-      </p:sp>
-      <p:sp>
-        <p:nvSpPr>
-          <p:cNvPr id="6" name="Rounded Rectangle 5"/>
-          <p:cNvSpPr/>
-          <p:nvPr/>
-        </p:nvSpPr>
-        <p:spPr>
-          <a:xfrm>
-            <a:off x="2774160" y="1566720"/>
-            <a:ext cx="211680" cy="17640"/>
-          </a:xfrm>
-          <a:prstGeom prst="roundRect">
-            <a:avLst>
-              <a:gd name="adj" fmla="val 42857"/>
-            </a:avLst>
-          </a:prstGeom>
-          <a:solidFill>
-            <a:srgbClr val="FFFFFF"/>
-          </a:solidFill>
-          <a:ln>
-            <a:noFill/>
-          </a:ln>
-        </p:spPr>
-        <p:txBody>
-          <a:bodyPr rtlCol="0" anchor="ctr"/>
-          <a:lstStyle/>
-          <a:p>
-            <a:pPr algn="ctr"/>
-          </a:p>
-        </p:txBody>
-      </p:sp>
-      <p:cxnSp>
-        <p:nvCxnSpPr>
-          <p:cNvPr id="7" name="Connector 6"/>
-          <p:cNvCxnSpPr/>
-          <p:nvPr/>
-        </p:nvCxnSpPr>
-        <p:spPr>
-          <a:xfrm flipV="1">
-            <a:off x="2854800" y="1385280"/>
-            <a:ext cx="10080" cy="40320"/>
-          </a:xfrm>
-          <a:prstGeom prst="line">
-            <a:avLst/>
-          </a:prstGeom>
-          <a:ln w="12600">
-            <a:solidFill>
-              <a:srgbClr val="FFFFFF"/>
-            </a:solidFill>
-          </a:ln>
-        </p:spPr>
-      </p:cxnSp>
-      <p:cxnSp>
-        <p:nvCxnSpPr>
-          <p:cNvPr id="8" name="Connector 7"/>
-          <p:cNvCxnSpPr/>
-          <p:nvPr/>
-        </p:nvCxnSpPr>
-        <p:spPr>
-          <a:xfrm flipV="1">
-            <a:off x="2900160" y="1385280"/>
-            <a:ext cx="10080" cy="40320"/>
-          </a:xfrm>
-          <a:prstGeom prst="line">
-            <a:avLst/>
-          </a:prstGeom>
-          <a:ln w="12600">
-            <a:solidFill>
-              <a:srgbClr val="FFFFFF"/>
-            </a:solidFill>
-          </a:ln>
-        </p:spPr>
-      </p:cxnSp>
-      <p:sp>
-        <p:nvSpPr>
-          <p:cNvPr id="9" name="텍스트"/>
-          <p:cNvSpPr txBox="1"/>
-          <p:nvPr/>
-        </p:nvSpPr>
-        <p:spPr>
-          <a:xfrm>
-            <a:off x="252000" y="324000"/>
-            <a:ext cx="1944000" cy="720000"/>
+            <a:off x="216000" y="72000"/>
+            <a:ext cx="1080000" cy="936000"/>
           </a:xfrm>
           <a:prstGeom prst="rect">
             <a:avLst/>
@@ -4108,32 +3620,32 @@
           <a:p>
             <a:pPr algn="l">
               <a:lnSpc>
-                <a:spcPts val="1739"/>
+                <a:spcPts val="15950"/>
               </a:lnSpc>
             </a:pPr>
             <a:r>
-              <a:rPr sz="1200" b="1">
+              <a:rPr sz="11000" b="1">
                 <a:solidFill>
-                  <a:srgbClr val="FFFFFF"/>
+                  <a:srgbClr val="D90429"/>
                 </a:solidFill>
                 <a:latin typeface="맑은 고딕"/>
                 <a:ea typeface="맑은 고딕"/>
               </a:rPr>
-              <a:t>달달한 위로가 필요한 날에</a:t>
-            </a:r>
-          </a:p>
-        </p:txBody>
-      </p:sp>
-      <p:sp>
-        <p:nvSpPr>
-          <p:cNvPr id="10" name="텍스트"/>
+              <a:t>“</a:t>
+            </a:r>
+          </a:p>
+        </p:txBody>
+      </p:sp>
+      <p:sp>
+        <p:nvSpPr>
+          <p:cNvPr id="3" name="텍스트"/>
           <p:cNvSpPr txBox="1"/>
           <p:nvPr/>
         </p:nvSpPr>
         <p:spPr>
           <a:xfrm>
-            <a:off x="252000" y="1476000"/>
-            <a:ext cx="1440000" cy="108000"/>
+            <a:off x="252000" y="792000"/>
+            <a:ext cx="2520000" cy="648000"/>
           </a:xfrm>
           <a:prstGeom prst="rect">
             <a:avLst/>
@@ -4148,13 +3660,74 @@
           <a:p>
             <a:pPr algn="l">
               <a:lnSpc>
-                <a:spcPts val="1087"/>
+                <a:spcPts val="1812"/>
               </a:lnSpc>
             </a:pPr>
             <a:r>
-              <a:rPr sz="750" b="1" spc="200">
+              <a:rPr sz="1250" b="1">
                 <a:solidFill>
-                  <a:srgbClr val="AEAEB9"/>
+                  <a:srgbClr val="12151C"/>
+                </a:solidFill>
+                <a:latin typeface="맑은 고딕"/>
+                <a:ea typeface="맑은 고딕"/>
+              </a:rPr>
+              <a:t>달달한 위로가 필요한 날에</a:t>
+            </a:r>
+          </a:p>
+        </p:txBody>
+      </p:sp>
+      <p:cxnSp>
+        <p:nvCxnSpPr>
+          <p:cNvPr id="4" name="Connector 3"/>
+          <p:cNvCxnSpPr/>
+          <p:nvPr/>
+        </p:nvCxnSpPr>
+        <p:spPr>
+          <a:xfrm>
+            <a:off x="252000" y="1512000"/>
+            <a:ext cx="2736000" cy="0"/>
+          </a:xfrm>
+          <a:prstGeom prst="line">
+            <a:avLst/>
+          </a:prstGeom>
+          <a:ln w="5760">
+            <a:solidFill>
+              <a:srgbClr val="E3E5E9"/>
+            </a:solidFill>
+          </a:ln>
+        </p:spPr>
+      </p:cxnSp>
+      <p:sp>
+        <p:nvSpPr>
+          <p:cNvPr id="5" name="텍스트"/>
+          <p:cNvSpPr txBox="1"/>
+          <p:nvPr/>
+        </p:nvSpPr>
+        <p:spPr>
+          <a:xfrm>
+            <a:off x="252000" y="1569600"/>
+            <a:ext cx="2736000" cy="123826"/>
+          </a:xfrm>
+          <a:prstGeom prst="rect">
+            <a:avLst/>
+          </a:prstGeom>
+          <a:noFill/>
+        </p:spPr>
+        <p:txBody>
+          <a:bodyPr wrap="square" lIns="0" rIns="0" tIns="0" bIns="0" anchor="t">
+            <a:spAutoFit/>
+          </a:bodyPr>
+          <a:lstStyle/>
+          <a:p>
+            <a:pPr algn="r">
+              <a:lnSpc>
+                <a:spcPts val="942"/>
+              </a:lnSpc>
+            </a:pPr>
+            <a:r>
+              <a:rPr sz="650" b="1" spc="200">
+                <a:solidFill>
+                  <a:srgbClr val="6B7280"/>
                 </a:solidFill>
                 <a:latin typeface="맑은 고딕"/>
                 <a:ea typeface="맑은 고딕"/>

--- a/public/fun/cards/food/food-44.pptx
+++ b/public/fun/cards/food/food-44.pptx
@@ -3105,8 +3105,8 @@
         </p:nvSpPr>
         <p:spPr>
           <a:xfrm>
-            <a:off x="252000" y="144000"/>
-            <a:ext cx="201600" cy="21600"/>
+            <a:off x="0" y="0"/>
+            <a:ext cx="3240000" cy="36000"/>
           </a:xfrm>
           <a:prstGeom prst="rect">
             <a:avLst/>
@@ -3134,8 +3134,8 @@
         </p:nvSpPr>
         <p:spPr>
           <a:xfrm>
-            <a:off x="252000" y="273600"/>
-            <a:ext cx="2160000" cy="360000"/>
+            <a:off x="252000" y="223200"/>
+            <a:ext cx="1296000" cy="237600"/>
           </a:xfrm>
           <a:prstGeom prst="rect">
             <a:avLst/>
@@ -3150,11 +3150,11 @@
           <a:p>
             <a:pPr algn="l">
               <a:lnSpc>
-                <a:spcPts val="3190"/>
+                <a:spcPts val="1957"/>
               </a:lnSpc>
             </a:pPr>
             <a:r>
-              <a:rPr sz="2200" b="1">
+              <a:rPr sz="1350" b="1" spc="120">
                 <a:solidFill>
                   <a:srgbClr val="12151C"/>
                 </a:solidFill>
@@ -3174,8 +3174,8 @@
         </p:nvSpPr>
         <p:spPr>
           <a:xfrm>
-            <a:off x="252000" y="676800"/>
-            <a:ext cx="2160000" cy="171451"/>
+            <a:off x="252000" y="475200"/>
+            <a:ext cx="1296000" cy="133351"/>
           </a:xfrm>
           <a:prstGeom prst="rect">
             <a:avLst/>
@@ -3190,11 +3190,11 @@
           <a:p>
             <a:pPr algn="l">
               <a:lnSpc>
-                <a:spcPts val="1305"/>
+                <a:spcPts val="1015"/>
               </a:lnSpc>
             </a:pPr>
             <a:r>
-              <a:rPr sz="900" b="0">
+              <a:rPr sz="700" b="0">
                 <a:solidFill>
                   <a:srgbClr val="5E0F21"/>
                 </a:solidFill>
@@ -3214,7 +3214,7 @@
         </p:nvSpPr>
         <p:spPr>
           <a:xfrm>
-            <a:off x="1548000" y="230400"/>
+            <a:off x="1548000" y="259200"/>
             <a:ext cx="1440000" cy="123826"/>
           </a:xfrm>
           <a:prstGeom prst="rect">
@@ -3234,7 +3234,7 @@
               </a:lnSpc>
             </a:pPr>
             <a:r>
-              <a:rPr sz="650" b="1" spc="200">
+              <a:rPr sz="650" b="1" spc="220">
                 <a:solidFill>
                   <a:srgbClr val="5E0F21"/>
                 </a:solidFill>
@@ -3254,13 +3254,13 @@
         </p:nvCxnSpPr>
         <p:spPr>
           <a:xfrm>
-            <a:off x="252000" y="1051200"/>
+            <a:off x="252000" y="907200"/>
             <a:ext cx="2736000" cy="0"/>
           </a:xfrm>
           <a:prstGeom prst="line">
             <a:avLst/>
           </a:prstGeom>
-          <a:ln w="5760">
+          <a:ln w="3600">
             <a:solidFill>
               <a:srgbClr val="F4B9C3"/>
             </a:solidFill>
@@ -3275,8 +3275,8 @@
         </p:nvSpPr>
         <p:spPr>
           <a:xfrm>
-            <a:off x="252000" y="1123200"/>
-            <a:ext cx="576000" cy="99061"/>
+            <a:off x="252000" y="986400"/>
+            <a:ext cx="576000" cy="91441"/>
           </a:xfrm>
           <a:prstGeom prst="rect">
             <a:avLst/>
@@ -3291,11 +3291,11 @@
           <a:p>
             <a:pPr algn="l">
               <a:lnSpc>
-                <a:spcPts val="754"/>
+                <a:spcPts val="696"/>
               </a:lnSpc>
             </a:pPr>
             <a:r>
-              <a:rPr sz="520" b="1" spc="150">
+              <a:rPr sz="480" b="1" spc="160">
                 <a:solidFill>
                   <a:srgbClr val="5E0F21"/>
                 </a:solidFill>
@@ -3315,8 +3315,8 @@
         </p:nvSpPr>
         <p:spPr>
           <a:xfrm>
-            <a:off x="900000" y="1101600"/>
-            <a:ext cx="2088000" cy="142876"/>
+            <a:off x="936000" y="968400"/>
+            <a:ext cx="2052000" cy="133351"/>
           </a:xfrm>
           <a:prstGeom prst="rect">
             <a:avLst/>
@@ -3331,11 +3331,11 @@
           <a:p>
             <a:pPr algn="l">
               <a:lnSpc>
-                <a:spcPts val="1087"/>
+                <a:spcPts val="1015"/>
               </a:lnSpc>
             </a:pPr>
             <a:r>
-              <a:rPr sz="750" b="0">
+              <a:rPr sz="700" b="0">
                 <a:solidFill>
                   <a:srgbClr val="12151C"/>
                 </a:solidFill>
@@ -3355,13 +3355,13 @@
         </p:nvCxnSpPr>
         <p:spPr>
           <a:xfrm>
-            <a:off x="252000" y="1274400"/>
+            <a:off x="252000" y="1137600"/>
             <a:ext cx="2736000" cy="0"/>
           </a:xfrm>
           <a:prstGeom prst="line">
             <a:avLst/>
           </a:prstGeom>
-          <a:ln w="5760">
+          <a:ln w="3600">
             <a:solidFill>
               <a:srgbClr val="F4B9C3"/>
             </a:solidFill>
@@ -3376,8 +3376,8 @@
         </p:nvSpPr>
         <p:spPr>
           <a:xfrm>
-            <a:off x="252000" y="1346400"/>
-            <a:ext cx="576000" cy="99061"/>
+            <a:off x="252000" y="1216800"/>
+            <a:ext cx="576000" cy="91441"/>
           </a:xfrm>
           <a:prstGeom prst="rect">
             <a:avLst/>
@@ -3392,11 +3392,11 @@
           <a:p>
             <a:pPr algn="l">
               <a:lnSpc>
-                <a:spcPts val="754"/>
+                <a:spcPts val="696"/>
               </a:lnSpc>
             </a:pPr>
             <a:r>
-              <a:rPr sz="520" b="1" spc="150">
+              <a:rPr sz="480" b="1" spc="160">
                 <a:solidFill>
                   <a:srgbClr val="5E0F21"/>
                 </a:solidFill>
@@ -3416,8 +3416,8 @@
         </p:nvSpPr>
         <p:spPr>
           <a:xfrm>
-            <a:off x="900000" y="1324800"/>
-            <a:ext cx="2088000" cy="142876"/>
+            <a:off x="936000" y="1198800"/>
+            <a:ext cx="2052000" cy="133351"/>
           </a:xfrm>
           <a:prstGeom prst="rect">
             <a:avLst/>
@@ -3432,11 +3432,11 @@
           <a:p>
             <a:pPr algn="l">
               <a:lnSpc>
-                <a:spcPts val="1087"/>
+                <a:spcPts val="1015"/>
               </a:lnSpc>
             </a:pPr>
             <a:r>
-              <a:rPr sz="750" b="0">
+              <a:rPr sz="700" b="0">
                 <a:solidFill>
                   <a:srgbClr val="12151C"/>
                 </a:solidFill>
@@ -3456,13 +3456,13 @@
         </p:nvCxnSpPr>
         <p:spPr>
           <a:xfrm>
-            <a:off x="252000" y="1497600"/>
+            <a:off x="252000" y="1368000"/>
             <a:ext cx="2736000" cy="0"/>
           </a:xfrm>
           <a:prstGeom prst="line">
             <a:avLst/>
           </a:prstGeom>
-          <a:ln w="5760">
+          <a:ln w="3600">
             <a:solidFill>
               <a:srgbClr val="F4B9C3"/>
             </a:solidFill>
@@ -3477,8 +3477,8 @@
         </p:nvSpPr>
         <p:spPr>
           <a:xfrm>
-            <a:off x="252000" y="1569600"/>
-            <a:ext cx="576000" cy="99061"/>
+            <a:off x="252000" y="1447200"/>
+            <a:ext cx="576000" cy="91441"/>
           </a:xfrm>
           <a:prstGeom prst="rect">
             <a:avLst/>
@@ -3493,11 +3493,11 @@
           <a:p>
             <a:pPr algn="l">
               <a:lnSpc>
-                <a:spcPts val="754"/>
+                <a:spcPts val="696"/>
               </a:lnSpc>
             </a:pPr>
             <a:r>
-              <a:rPr sz="520" b="1" spc="150">
+              <a:rPr sz="480" b="1" spc="160">
                 <a:solidFill>
                   <a:srgbClr val="5E0F21"/>
                 </a:solidFill>
@@ -3517,8 +3517,8 @@
         </p:nvSpPr>
         <p:spPr>
           <a:xfrm>
-            <a:off x="900000" y="1548000"/>
-            <a:ext cx="2088000" cy="142876"/>
+            <a:off x="936000" y="1429200"/>
+            <a:ext cx="2052000" cy="133351"/>
           </a:xfrm>
           <a:prstGeom prst="rect">
             <a:avLst/>
@@ -3533,11 +3533,11 @@
           <a:p>
             <a:pPr algn="l">
               <a:lnSpc>
-                <a:spcPts val="1087"/>
+                <a:spcPts val="1015"/>
               </a:lnSpc>
             </a:pPr>
             <a:r>
-              <a:rPr sz="750" b="0">
+              <a:rPr sz="700" b="0">
                 <a:solidFill>
                   <a:srgbClr val="12151C"/>
                 </a:solidFill>
@@ -3557,13 +3557,13 @@
         </p:nvCxnSpPr>
         <p:spPr>
           <a:xfrm>
-            <a:off x="252000" y="1720800"/>
+            <a:off x="252000" y="1598400"/>
             <a:ext cx="2736000" cy="0"/>
           </a:xfrm>
           <a:prstGeom prst="line">
             <a:avLst/>
           </a:prstGeom>
-          <a:ln w="5760">
+          <a:ln w="3600">
             <a:solidFill>
               <a:srgbClr val="F4B9C3"/>
             </a:solidFill>
@@ -3598,19 +3598,79 @@
       <p:grpSpPr/>
       <p:sp>
         <p:nvSpPr>
-          <p:cNvPr id="2" name="텍스트"/>
-          <p:cNvSpPr txBox="1"/>
+          <p:cNvPr id="2" name="Rectangle 1"/>
+          <p:cNvSpPr/>
           <p:nvPr/>
         </p:nvSpPr>
         <p:spPr>
           <a:xfrm>
-            <a:off x="216000" y="72000"/>
-            <a:ext cx="1080000" cy="936000"/>
+            <a:off x="0" y="0"/>
+            <a:ext cx="3240000" cy="1800000"/>
+          </a:xfrm>
+          <a:prstGeom prst="rect">
+            <a:avLst/>
+          </a:prstGeom>
+          <a:solidFill>
+            <a:srgbClr val="D90429"/>
+          </a:solidFill>
+          <a:ln>
+            <a:noFill/>
+          </a:ln>
+        </p:spPr>
+        <p:txBody>
+          <a:bodyPr rtlCol="0" anchor="ctr"/>
+          <a:lstStyle/>
+          <a:p>
+            <a:pPr algn="ctr"/>
+          </a:p>
+        </p:txBody>
+      </p:sp>
+      <p:sp>
+        <p:nvSpPr>
+          <p:cNvPr id="3" name="Rectangle 2"/>
+          <p:cNvSpPr/>
+          <p:nvPr/>
+        </p:nvSpPr>
+        <p:spPr>
+          <a:xfrm>
+            <a:off x="108000" y="108000"/>
+            <a:ext cx="3024000" cy="1584000"/>
           </a:xfrm>
           <a:prstGeom prst="rect">
             <a:avLst/>
           </a:prstGeom>
           <a:noFill/>
+          <a:ln w="3600">
+            <a:solidFill>
+              <a:srgbClr val="FFFFFF">
+                <a:alpha val="50000"/>
+              </a:srgbClr>
+            </a:solidFill>
+          </a:ln>
+        </p:spPr>
+        <p:txBody>
+          <a:bodyPr rtlCol="0" anchor="ctr"/>
+          <a:lstStyle/>
+          <a:p>
+            <a:pPr algn="ctr"/>
+          </a:p>
+        </p:txBody>
+      </p:sp>
+      <p:sp>
+        <p:nvSpPr>
+          <p:cNvPr id="4" name="텍스트"/>
+          <p:cNvSpPr txBox="1"/>
+          <p:nvPr/>
+        </p:nvSpPr>
+        <p:spPr>
+          <a:xfrm>
+            <a:off x="288000" y="280800"/>
+            <a:ext cx="1440000" cy="99061"/>
+          </a:xfrm>
+          <a:prstGeom prst="rect">
+            <a:avLst/>
+          </a:prstGeom>
+          <a:noFill/>
         </p:spPr>
         <p:txBody>
           <a:bodyPr wrap="square" lIns="0" rIns="0" tIns="0" bIns="0" anchor="t">
@@ -3620,32 +3680,32 @@
           <a:p>
             <a:pPr algn="l">
               <a:lnSpc>
-                <a:spcPts val="15950"/>
+                <a:spcPts val="754"/>
               </a:lnSpc>
             </a:pPr>
             <a:r>
-              <a:rPr sz="11000" b="1">
+              <a:rPr sz="520" b="1" spc="240">
                 <a:solidFill>
-                  <a:srgbClr val="D90429"/>
+                  <a:srgbClr val="FFFFFF"/>
                 </a:solidFill>
                 <a:latin typeface="맑은 고딕"/>
                 <a:ea typeface="맑은 고딕"/>
               </a:rPr>
-              <a:t>“</a:t>
-            </a:r>
-          </a:p>
-        </p:txBody>
-      </p:sp>
-      <p:sp>
-        <p:nvSpPr>
-          <p:cNvPr id="3" name="텍스트"/>
+              <a:t>대표 메뉴</a:t>
+            </a:r>
+          </a:p>
+        </p:txBody>
+      </p:sp>
+      <p:sp>
+        <p:nvSpPr>
+          <p:cNvPr id="5" name="텍스트"/>
           <p:cNvSpPr txBox="1"/>
           <p:nvPr/>
         </p:nvSpPr>
         <p:spPr>
           <a:xfrm>
-            <a:off x="252000" y="792000"/>
-            <a:ext cx="2520000" cy="648000"/>
+            <a:off x="288000" y="468000"/>
+            <a:ext cx="1872000" cy="216000"/>
           </a:xfrm>
           <a:prstGeom prst="rect">
             <a:avLst/>
@@ -3660,53 +3720,53 @@
           <a:p>
             <a:pPr algn="l">
               <a:lnSpc>
-                <a:spcPts val="1812"/>
+                <a:spcPts val="1377"/>
               </a:lnSpc>
             </a:pPr>
             <a:r>
-              <a:rPr sz="1250" b="1">
+              <a:rPr sz="950" b="1">
                 <a:solidFill>
-                  <a:srgbClr val="12151C"/>
+                  <a:srgbClr val="FFFFFF"/>
                 </a:solidFill>
                 <a:latin typeface="맑은 고딕"/>
                 <a:ea typeface="맑은 고딕"/>
               </a:rPr>
-              <a:t>달달한 위로가 필요한 날에</a:t>
+              <a:t>브런치</a:t>
             </a:r>
           </a:p>
         </p:txBody>
       </p:sp>
       <p:cxnSp>
         <p:nvCxnSpPr>
-          <p:cNvPr id="4" name="Connector 3"/>
+          <p:cNvPr id="6" name="Connector 5"/>
           <p:cNvCxnSpPr/>
           <p:nvPr/>
         </p:nvCxnSpPr>
         <p:spPr>
           <a:xfrm>
-            <a:off x="252000" y="1512000"/>
-            <a:ext cx="2736000" cy="0"/>
+            <a:off x="288000" y="669600"/>
+            <a:ext cx="1728000" cy="0"/>
           </a:xfrm>
           <a:prstGeom prst="line">
             <a:avLst/>
           </a:prstGeom>
-          <a:ln w="5760">
+          <a:ln w="3600">
             <a:solidFill>
-              <a:srgbClr val="E3E5E9"/>
+              <a:srgbClr val="FFFFFF"/>
             </a:solidFill>
           </a:ln>
         </p:spPr>
       </p:cxnSp>
       <p:sp>
         <p:nvSpPr>
-          <p:cNvPr id="5" name="텍스트"/>
+          <p:cNvPr id="7" name="텍스트"/>
           <p:cNvSpPr txBox="1"/>
           <p:nvPr/>
         </p:nvSpPr>
         <p:spPr>
           <a:xfrm>
-            <a:off x="252000" y="1569600"/>
-            <a:ext cx="2736000" cy="123826"/>
+            <a:off x="288000" y="691200"/>
+            <a:ext cx="1872000" cy="216000"/>
           </a:xfrm>
           <a:prstGeom prst="rect">
             <a:avLst/>
@@ -3719,15 +3779,301 @@
           </a:bodyPr>
           <a:lstStyle/>
           <a:p>
-            <a:pPr algn="r">
+            <a:pPr algn="l">
+              <a:lnSpc>
+                <a:spcPts val="1377"/>
+              </a:lnSpc>
+            </a:pPr>
+            <a:r>
+              <a:rPr sz="950" b="1">
+                <a:solidFill>
+                  <a:srgbClr val="FFFFFF"/>
+                </a:solidFill>
+                <a:latin typeface="맑은 고딕"/>
+                <a:ea typeface="맑은 고딕"/>
+              </a:rPr>
+              <a:t>예약 문의</a:t>
+            </a:r>
+          </a:p>
+        </p:txBody>
+      </p:sp>
+      <p:cxnSp>
+        <p:nvCxnSpPr>
+          <p:cNvPr id="8" name="Connector 7"/>
+          <p:cNvCxnSpPr/>
+          <p:nvPr/>
+        </p:nvCxnSpPr>
+        <p:spPr>
+          <a:xfrm>
+            <a:off x="288000" y="892800"/>
+            <a:ext cx="1728000" cy="0"/>
+          </a:xfrm>
+          <a:prstGeom prst="line">
+            <a:avLst/>
+          </a:prstGeom>
+          <a:ln w="3600">
+            <a:solidFill>
+              <a:srgbClr val="FFFFFF"/>
+            </a:solidFill>
+          </a:ln>
+        </p:spPr>
+      </p:cxnSp>
+      <p:sp>
+        <p:nvSpPr>
+          <p:cNvPr id="9" name="텍스트"/>
+          <p:cNvSpPr txBox="1"/>
+          <p:nvPr/>
+        </p:nvSpPr>
+        <p:spPr>
+          <a:xfrm>
+            <a:off x="288000" y="914400"/>
+            <a:ext cx="1872000" cy="216000"/>
+          </a:xfrm>
+          <a:prstGeom prst="rect">
+            <a:avLst/>
+          </a:prstGeom>
+          <a:noFill/>
+        </p:spPr>
+        <p:txBody>
+          <a:bodyPr wrap="square" lIns="0" rIns="0" tIns="0" bIns="0" anchor="t">
+            <a:spAutoFit/>
+          </a:bodyPr>
+          <a:lstStyle/>
+          <a:p>
+            <a:pPr algn="l">
+              <a:lnSpc>
+                <a:spcPts val="1377"/>
+              </a:lnSpc>
+            </a:pPr>
+            <a:r>
+              <a:rPr sz="950" b="1">
+                <a:solidFill>
+                  <a:srgbClr val="FFFFFF"/>
+                </a:solidFill>
+                <a:latin typeface="맑은 고딕"/>
+                <a:ea typeface="맑은 고딕"/>
+              </a:rPr>
+              <a:t>시즌 메뉴</a:t>
+            </a:r>
+          </a:p>
+        </p:txBody>
+      </p:sp>
+      <p:cxnSp>
+        <p:nvCxnSpPr>
+          <p:cNvPr id="10" name="Connector 9"/>
+          <p:cNvCxnSpPr/>
+          <p:nvPr/>
+        </p:nvCxnSpPr>
+        <p:spPr>
+          <a:xfrm>
+            <a:off x="288000" y="1116000"/>
+            <a:ext cx="1728000" cy="0"/>
+          </a:xfrm>
+          <a:prstGeom prst="line">
+            <a:avLst/>
+          </a:prstGeom>
+          <a:ln w="3600">
+            <a:solidFill>
+              <a:srgbClr val="FFFFFF"/>
+            </a:solidFill>
+          </a:ln>
+        </p:spPr>
+      </p:cxnSp>
+      <p:sp>
+        <p:nvSpPr>
+          <p:cNvPr id="11" name="텍스트"/>
+          <p:cNvSpPr txBox="1"/>
+          <p:nvPr/>
+        </p:nvSpPr>
+        <p:spPr>
+          <a:xfrm>
+            <a:off x="2268000" y="468000"/>
+            <a:ext cx="864000" cy="91441"/>
+          </a:xfrm>
+          <a:prstGeom prst="rect">
+            <a:avLst/>
+          </a:prstGeom>
+          <a:noFill/>
+        </p:spPr>
+        <p:txBody>
+          <a:bodyPr wrap="square" lIns="0" rIns="0" tIns="0" bIns="0" anchor="t">
+            <a:spAutoFit/>
+          </a:bodyPr>
+          <a:lstStyle/>
+          <a:p>
+            <a:pPr algn="l">
+              <a:lnSpc>
+                <a:spcPts val="696"/>
+              </a:lnSpc>
+            </a:pPr>
+            <a:r>
+              <a:rPr sz="480" b="1" spc="140">
+                <a:solidFill>
+                  <a:srgbClr val="FFFFFF">
+                    <a:alpha val="75000"/>
+                  </a:srgbClr>
+                </a:solidFill>
+                <a:latin typeface="맑은 고딕"/>
+                <a:ea typeface="맑은 고딕"/>
+              </a:rPr>
+              <a:t>HOURS</a:t>
+            </a:r>
+          </a:p>
+        </p:txBody>
+      </p:sp>
+      <p:sp>
+        <p:nvSpPr>
+          <p:cNvPr id="12" name="텍스트"/>
+          <p:cNvSpPr txBox="1"/>
+          <p:nvPr/>
+        </p:nvSpPr>
+        <p:spPr>
+          <a:xfrm>
+            <a:off x="2268000" y="576000"/>
+            <a:ext cx="864000" cy="118111"/>
+          </a:xfrm>
+          <a:prstGeom prst="rect">
+            <a:avLst/>
+          </a:prstGeom>
+          <a:noFill/>
+        </p:spPr>
+        <p:txBody>
+          <a:bodyPr wrap="square" lIns="0" rIns="0" tIns="0" bIns="0" anchor="t">
+            <a:spAutoFit/>
+          </a:bodyPr>
+          <a:lstStyle/>
+          <a:p>
+            <a:pPr algn="l">
+              <a:lnSpc>
+                <a:spcPts val="899"/>
+              </a:lnSpc>
+            </a:pPr>
+            <a:r>
+              <a:rPr sz="620" b="1">
+                <a:solidFill>
+                  <a:srgbClr val="FFFFFF"/>
+                </a:solidFill>
+                <a:latin typeface="맑은 고딕"/>
+                <a:ea typeface="맑은 고딕"/>
+              </a:rPr>
+              <a:t>매일 10:00 – 22:00</a:t>
+            </a:r>
+          </a:p>
+        </p:txBody>
+      </p:sp>
+      <p:sp>
+        <p:nvSpPr>
+          <p:cNvPr id="13" name="텍스트"/>
+          <p:cNvSpPr txBox="1"/>
+          <p:nvPr/>
+        </p:nvSpPr>
+        <p:spPr>
+          <a:xfrm>
+            <a:off x="2268000" y="900000"/>
+            <a:ext cx="864000" cy="91441"/>
+          </a:xfrm>
+          <a:prstGeom prst="rect">
+            <a:avLst/>
+          </a:prstGeom>
+          <a:noFill/>
+        </p:spPr>
+        <p:txBody>
+          <a:bodyPr wrap="square" lIns="0" rIns="0" tIns="0" bIns="0" anchor="t">
+            <a:spAutoFit/>
+          </a:bodyPr>
+          <a:lstStyle/>
+          <a:p>
+            <a:pPr algn="l">
+              <a:lnSpc>
+                <a:spcPts val="696"/>
+              </a:lnSpc>
+            </a:pPr>
+            <a:r>
+              <a:rPr sz="480" b="1" spc="140">
+                <a:solidFill>
+                  <a:srgbClr val="FFFFFF">
+                    <a:alpha val="75000"/>
+                  </a:srgbClr>
+                </a:solidFill>
+                <a:latin typeface="맑은 고딕"/>
+                <a:ea typeface="맑은 고딕"/>
+              </a:rPr>
+              <a:t>BLOG</a:t>
+            </a:r>
+          </a:p>
+        </p:txBody>
+      </p:sp>
+      <p:sp>
+        <p:nvSpPr>
+          <p:cNvPr id="14" name="텍스트"/>
+          <p:cNvSpPr txBox="1"/>
+          <p:nvPr/>
+        </p:nvSpPr>
+        <p:spPr>
+          <a:xfrm>
+            <a:off x="2268000" y="1008000"/>
+            <a:ext cx="864000" cy="118111"/>
+          </a:xfrm>
+          <a:prstGeom prst="rect">
+            <a:avLst/>
+          </a:prstGeom>
+          <a:noFill/>
+        </p:spPr>
+        <p:txBody>
+          <a:bodyPr wrap="square" lIns="0" rIns="0" tIns="0" bIns="0" anchor="t">
+            <a:spAutoFit/>
+          </a:bodyPr>
+          <a:lstStyle/>
+          <a:p>
+            <a:pPr algn="l">
+              <a:lnSpc>
+                <a:spcPts val="899"/>
+              </a:lnSpc>
+            </a:pPr>
+            <a:r>
+              <a:rPr sz="620" b="1">
+                <a:solidFill>
+                  <a:srgbClr val="FFFFFF"/>
+                </a:solidFill>
+                <a:latin typeface="맑은 고딕"/>
+                <a:ea typeface="맑은 고딕"/>
+              </a:rPr>
+              <a:t>blog.example.com</a:t>
+            </a:r>
+          </a:p>
+        </p:txBody>
+      </p:sp>
+      <p:sp>
+        <p:nvSpPr>
+          <p:cNvPr id="15" name="텍스트"/>
+          <p:cNvSpPr txBox="1"/>
+          <p:nvPr/>
+        </p:nvSpPr>
+        <p:spPr>
+          <a:xfrm>
+            <a:off x="288000" y="1512000"/>
+            <a:ext cx="1800000" cy="123826"/>
+          </a:xfrm>
+          <a:prstGeom prst="rect">
+            <a:avLst/>
+          </a:prstGeom>
+          <a:noFill/>
+        </p:spPr>
+        <p:txBody>
+          <a:bodyPr wrap="square" lIns="0" rIns="0" tIns="0" bIns="0" anchor="t">
+            <a:spAutoFit/>
+          </a:bodyPr>
+          <a:lstStyle/>
+          <a:p>
+            <a:pPr algn="l">
               <a:lnSpc>
                 <a:spcPts val="942"/>
               </a:lnSpc>
             </a:pPr>
             <a:r>
-              <a:rPr sz="650" b="1" spc="200">
+              <a:rPr sz="650" b="1" spc="220">
                 <a:solidFill>
-                  <a:srgbClr val="6B7280"/>
+                  <a:srgbClr val="FFFFFF"/>
                 </a:solidFill>
                 <a:latin typeface="맑은 고딕"/>
                 <a:ea typeface="맑은 고딕"/>
